--- a/Tourist Attraction Planner PPT.pptx
+++ b/Tourist Attraction Planner PPT.pptx
@@ -3156,7 +3156,7 @@
         </p:nvSpPr>
         <p:spPr>
           <a:xfrm>
-            <a:off x="594360" y="347472"/>
+            <a:off x="822960" y="1671066"/>
             <a:ext cx="10972800" cy="594360"/>
           </a:xfrm>
           <a:prstGeom prst="rect">
@@ -3191,7 +3191,7 @@
         </p:nvSpPr>
         <p:spPr>
           <a:xfrm>
-            <a:off x="621792" y="914400"/>
+            <a:off x="685800" y="2308860"/>
             <a:ext cx="10881360" cy="411480"/>
           </a:xfrm>
           <a:prstGeom prst="rect">
@@ -3213,6 +3213,7 @@
               </a:defRPr>
             </a:pPr>
             <a:r>
+              <a:rPr dirty="0"/>
               <a:t>Smart attraction selection + feasible route planning under time and budget constraints</a:t>
             </a:r>
           </a:p>
@@ -3226,7 +3227,7 @@
         </p:nvSpPr>
         <p:spPr>
           <a:xfrm>
-            <a:off x="640080" y="1417320"/>
+            <a:off x="822960" y="2651760"/>
             <a:ext cx="7040880" cy="1234440"/>
           </a:xfrm>
           <a:prstGeom prst="roundRect">
@@ -3305,7 +3306,7 @@
         </p:nvSpPr>
         <p:spPr>
           <a:xfrm>
-            <a:off x="640080" y="2880360"/>
+            <a:off x="822960" y="4087368"/>
             <a:ext cx="3383280" cy="2423160"/>
           </a:xfrm>
           <a:prstGeom prst="roundRect">
@@ -3451,7 +3452,7 @@
         </p:nvSpPr>
         <p:spPr>
           <a:xfrm>
-            <a:off x="4251960" y="2880360"/>
+            <a:off x="4541765" y="4087368"/>
             <a:ext cx="3429000" cy="2423160"/>
           </a:xfrm>
           <a:prstGeom prst="roundRect">
@@ -3599,7 +3600,7 @@
         </p:nvSpPr>
         <p:spPr>
           <a:xfrm>
-            <a:off x="7909560" y="1417320"/>
+            <a:off x="8352011" y="2624328"/>
             <a:ext cx="3566160" cy="3886200"/>
           </a:xfrm>
           <a:prstGeom prst="roundRect">
@@ -3783,6 +3784,36 @@
           </a:p>
         </p:txBody>
       </p:sp>
+      <p:pic>
+        <p:nvPicPr>
+          <p:cNvPr id="10" name="Picture 9">
+            <a:extLst>
+              <a:ext uri="{FF2B5EF4-FFF2-40B4-BE49-F238E27FC236}">
+                <a16:creationId xmlns:a16="http://schemas.microsoft.com/office/drawing/2014/main" id="{79C1CBA2-4AE8-569E-C0F9-26CC00AABD79}"/>
+              </a:ext>
+            </a:extLst>
+          </p:cNvPr>
+          <p:cNvPicPr>
+            <a:picLocks noChangeAspect="1"/>
+          </p:cNvPicPr>
+          <p:nvPr/>
+        </p:nvPicPr>
+        <p:blipFill>
+          <a:blip r:embed="rId2"/>
+          <a:stretch>
+            <a:fillRect/>
+          </a:stretch>
+        </p:blipFill>
+        <p:spPr>
+          <a:xfrm>
+            <a:off x="-1" y="164592"/>
+            <a:ext cx="12192001" cy="1615047"/>
+          </a:xfrm>
+          <a:prstGeom prst="rect">
+            <a:avLst/>
+          </a:prstGeom>
+        </p:spPr>
+      </p:pic>
     </p:spTree>
   </p:cSld>
   <p:clrMapOvr>
